--- a/web/app/public/deck/BlockID-Startup-Passport-pitch.pptx
+++ b/web/app/public/deck/BlockID-Startup-Passport-pitch.pptx
@@ -4151,24 +4151,24 @@
         </p:nvSpPr>
         <p:spPr>
           <a:xfrm>
-            <a:off x="7772400" y="4983480"/>
-            <a:ext cx="3749040" cy="1051560"/>
-          </a:xfrm>
-          <a:prstGeom prst="rect">
-            <a:avLst/>
-          </a:prstGeom>
-          <a:noFill/>
-          <a:ln/>
-        </p:spPr>
-        <p:txBody>
-          <a:bodyPr wrap="square" lIns="0" tIns="0" rIns="0" bIns="0" rtlCol="0" anchor="ctr"/>
-          <a:lstStyle/>
-          <a:p>
-            <a:pPr indent="0" marL="0">
-              <a:buNone/>
-            </a:pPr>
-            <a:r>
-              <a:rPr lang="en-US" sz="1250" b="1" dirty="0">
+            <a:off x="7772400" y="4892040"/>
+            <a:ext cx="3749040" cy="1188720"/>
+          </a:xfrm>
+          <a:prstGeom prst="rect">
+            <a:avLst/>
+          </a:prstGeom>
+          <a:noFill/>
+          <a:ln/>
+        </p:spPr>
+        <p:txBody>
+          <a:bodyPr wrap="square" lIns="0" tIns="0" rIns="0" bIns="0" rtlCol="0" anchor="ctr"/>
+          <a:lstStyle/>
+          <a:p>
+            <a:pPr indent="0" marL="0">
+              <a:buNone/>
+            </a:pPr>
+            <a:r>
+              <a:rPr lang="en-US" sz="1200" b="1" dirty="0">
                 <a:solidFill>
                   <a:srgbClr val="F2F7F5"/>
                 </a:solidFill>
@@ -4178,14 +4178,14 @@
               </a:rPr>
               <a:t>eth.blockid.au</a:t>
             </a:r>
-            <a:endParaRPr lang="en-US" sz="1250" dirty="0"/>
-          </a:p>
-          <a:p>
-            <a:pPr indent="0" marL="0">
-              <a:buNone/>
-            </a:pPr>
-            <a:r>
-              <a:rPr lang="en-US" sz="1250" dirty="0">
+            <a:endParaRPr lang="en-US" sz="1200" dirty="0"/>
+          </a:p>
+          <a:p>
+            <a:pPr indent="0" marL="0">
+              <a:buNone/>
+            </a:pPr>
+            <a:r>
+              <a:rPr lang="en-US" sz="1200" dirty="0">
                 <a:solidFill>
                   <a:srgbClr val="F2F7F5"/>
                 </a:solidFill>
@@ -4195,14 +4195,14 @@
               </a:rPr>
               <a:t>scan.blockid.au</a:t>
             </a:r>
-            <a:endParaRPr lang="en-US" sz="1250" dirty="0"/>
-          </a:p>
-          <a:p>
-            <a:pPr indent="0" marL="0">
-              <a:buNone/>
-            </a:pPr>
-            <a:r>
-              <a:rPr lang="en-US" sz="1250" dirty="0">
+            <a:endParaRPr lang="en-US" sz="1200" dirty="0"/>
+          </a:p>
+          <a:p>
+            <a:pPr indent="0" marL="0">
+              <a:buNone/>
+            </a:pPr>
+            <a:r>
+              <a:rPr lang="en-US" sz="1200" dirty="0">
                 <a:solidFill>
                   <a:srgbClr val="F2F7F5"/>
                 </a:solidFill>
@@ -4212,14 +4212,14 @@
               </a:rPr>
               <a:t>github.com/Blockid-au/eth-blockid-hackathon</a:t>
             </a:r>
-            <a:endParaRPr lang="en-US" sz="1250" dirty="0"/>
-          </a:p>
-          <a:p>
-            <a:pPr indent="0" marL="0">
-              <a:buNone/>
-            </a:pPr>
-            <a:r>
-              <a:rPr lang="en-US" sz="1250" dirty="0">
+            <a:endParaRPr lang="en-US" sz="1200" dirty="0"/>
+          </a:p>
+          <a:p>
+            <a:pPr indent="0" marL="0">
+              <a:buNone/>
+            </a:pPr>
+            <a:r>
+              <a:rPr lang="en-US" sz="1200" dirty="0">
                 <a:solidFill>
                   <a:srgbClr val="F2F7F5"/>
                 </a:solidFill>
@@ -4229,7 +4229,31 @@
               </a:rPr>
               <a:t>long@blockid.au</a:t>
             </a:r>
-            <a:endParaRPr lang="en-US" sz="1250" dirty="0"/>
+            <a:endParaRPr lang="en-US" sz="1200" dirty="0"/>
+          </a:p>
+          <a:p>
+            <a:pPr indent="0" marL="0">
+              <a:buNone/>
+            </a:pPr>
+            <a:r>
+              <a:rPr lang="en-US" sz="1200" b="1" u="sng" dirty="0">
+                <a:solidFill>
+                  <a:srgbClr val="22A07F"/>
+                </a:solidFill>
+                <a:latin typeface="Calibri" pitchFamily="34" charset="0"/>
+                <a:ea typeface="Calibri" pitchFamily="34" charset="-122"/>
+                <a:cs typeface="Calibri" pitchFamily="34" charset="-120"/>
+                <a:hlinkClick r:id="rId3" invalidUrl="" action="" tgtFrame="" tooltip="Long Do on LinkedIn" history="1" highlightClick="0" endSnd="0">
+                  <a:extLst>
+                    <a:ext uri="{A12FA001-AC4F-418D-AE19-62706E023703}">
+                      <ahyp:hlinkClr xmlns:ahyp="http://schemas.microsoft.com/office/drawing/2018/hyperlinkcolor" val="tx"/>
+                    </a:ext>
+                  </a:extLst>
+                </a:hlinkClick>
+              </a:rPr>
+              <a:t>linkedin.com/in/dovanlong</a:t>
+            </a:r>
+            <a:endParaRPr lang="en-US" sz="1200" dirty="0"/>
           </a:p>
         </p:txBody>
       </p:sp>

--- a/web/app/public/deck/BlockID-Startup-Passport-pitch.pptx
+++ b/web/app/public/deck/BlockID-Startup-Passport-pitch.pptx
@@ -3860,7 +3860,7 @@
         <p:spPr>
           <a:xfrm>
             <a:off x="822960" y="3154680"/>
-            <a:ext cx="6217920" cy="411480"/>
+            <a:ext cx="4206240" cy="411480"/>
           </a:xfrm>
           <a:prstGeom prst="rect">
             <a:avLst/>
@@ -3899,23 +3899,23 @@
         <p:spPr>
           <a:xfrm>
             <a:off x="822960" y="3566160"/>
-            <a:ext cx="6217920" cy="365760"/>
-          </a:xfrm>
-          <a:prstGeom prst="rect">
-            <a:avLst/>
-          </a:prstGeom>
-          <a:noFill/>
-          <a:ln/>
-        </p:spPr>
-        <p:txBody>
-          <a:bodyPr wrap="square" lIns="0" tIns="0" rIns="0" bIns="0" rtlCol="0" anchor="ctr"/>
-          <a:lstStyle/>
-          <a:p>
-            <a:pPr indent="0" marL="0">
-              <a:buNone/>
-            </a:pPr>
-            <a:r>
-              <a:rPr lang="en-US" sz="1350" dirty="0">
+            <a:ext cx="4206240" cy="365760"/>
+          </a:xfrm>
+          <a:prstGeom prst="rect">
+            <a:avLst/>
+          </a:prstGeom>
+          <a:noFill/>
+          <a:ln/>
+        </p:spPr>
+        <p:txBody>
+          <a:bodyPr wrap="square" lIns="0" tIns="0" rIns="0" bIns="0" rtlCol="0" anchor="ctr"/>
+          <a:lstStyle/>
+          <a:p>
+            <a:pPr indent="0" marL="0">
+              <a:buNone/>
+            </a:pPr>
+            <a:r>
+              <a:rPr lang="en-US" sz="1300" dirty="0">
                 <a:solidFill>
                   <a:srgbClr val="E3A83A"/>
                 </a:solidFill>
@@ -3925,7 +3925,7 @@
               </a:rPr>
               <a:t>Founder &amp; CEO, Auschain Pty Ltd (BlockID.au, StartupValueIndex.com)</a:t>
             </a:r>
-            <a:endParaRPr lang="en-US" sz="1350" dirty="0"/>
+            <a:endParaRPr lang="en-US" sz="1300" dirty="0"/>
           </a:p>
         </p:txBody>
       </p:sp>
@@ -3937,8 +3937,8 @@
         </p:nvSpPr>
         <p:spPr>
           <a:xfrm>
-            <a:off x="822960" y="4023360"/>
-            <a:ext cx="6217920" cy="1920240"/>
+            <a:off x="822960" y="4005072"/>
+            <a:ext cx="4114800" cy="1965960"/>
           </a:xfrm>
           <a:prstGeom prst="rect">
             <a:avLst/>
@@ -3952,13 +3952,13 @@
           <a:p>
             <a:pPr marL="342900" indent="-342900">
               <a:spcAft>
-                <a:spcPts val="800"/>
+                <a:spcPts val="700"/>
               </a:spcAft>
               <a:buSzPct val="100000"/>
               <a:buChar char="•"/>
             </a:pPr>
             <a:r>
-              <a:rPr lang="en-US" sz="1350" dirty="0">
+              <a:rPr lang="en-US" sz="1300" dirty="0">
                 <a:solidFill>
                   <a:srgbClr val="F2F7F5"/>
                 </a:solidFill>
@@ -3968,18 +3968,18 @@
               </a:rPr>
               <a:t>23+ years in IT; founder of Vietnam Blockchain Corporation — 50+ blockchain projects, 45+ awards</a:t>
             </a:r>
-            <a:endParaRPr lang="en-US" sz="1350" dirty="0"/>
+            <a:endParaRPr lang="en-US" sz="1300" dirty="0"/>
           </a:p>
           <a:p>
             <a:pPr marL="342900" indent="-342900">
               <a:spcAft>
-                <a:spcPts val="800"/>
+                <a:spcPts val="700"/>
               </a:spcAft>
               <a:buSzPct val="100000"/>
               <a:buChar char="•"/>
             </a:pPr>
             <a:r>
-              <a:rPr lang="en-US" sz="1350" dirty="0">
+              <a:rPr lang="en-US" sz="1300" dirty="0">
                 <a:solidFill>
                   <a:srgbClr val="F2F7F5"/>
                 </a:solidFill>
@@ -3989,18 +3989,18 @@
               </a:rPr>
               <a:t>National-scale deployments: Agridential, CovidPass.vn (with Vietnam's Ministry of Health)</a:t>
             </a:r>
-            <a:endParaRPr lang="en-US" sz="1350" dirty="0"/>
+            <a:endParaRPr lang="en-US" sz="1300" dirty="0"/>
           </a:p>
           <a:p>
             <a:pPr marL="342900" indent="-342900">
               <a:spcAft>
-                <a:spcPts val="800"/>
+                <a:spcPts val="700"/>
               </a:spcAft>
               <a:buSzPct val="100000"/>
               <a:buChar char="•"/>
             </a:pPr>
             <a:r>
-              <a:rPr lang="en-US" sz="1350" dirty="0">
+              <a:rPr lang="en-US" sz="1300" dirty="0">
                 <a:solidFill>
                   <a:srgbClr val="F2F7F5"/>
                 </a:solidFill>
@@ -4010,13 +4010,115 @@
               </a:rPr>
               <a:t>DBA candidate, SSBM Geneva — thesis: the Startup Value Index (SVI)</a:t>
             </a:r>
-            <a:endParaRPr lang="en-US" sz="1350" dirty="0"/>
-          </a:p>
-        </p:txBody>
-      </p:sp>
-      <p:sp>
-        <p:nvSpPr>
-          <p:cNvPr id="9" name="Shape 6"/>
+            <a:endParaRPr lang="en-US" sz="1300" dirty="0"/>
+          </a:p>
+        </p:txBody>
+      </p:sp>
+      <p:pic>
+        <p:nvPicPr>
+          <p:cNvPr id="9" name="Image 1" descr="preencoded.png">    </p:cNvPr>
+          <p:cNvPicPr>
+            <a:picLocks noChangeAspect="1"/>
+          </p:cNvPicPr>
+          <p:nvPr/>
+        </p:nvPicPr>
+        <p:blipFill>
+          <a:blip r:embed="rId2"/>
+          <a:stretch>
+            <a:fillRect/>
+          </a:stretch>
+        </p:blipFill>
+        <p:spPr>
+          <a:xfrm>
+            <a:off x="5166360" y="3154680"/>
+            <a:ext cx="1874520" cy="1874520"/>
+          </a:xfrm>
+          <a:prstGeom prst="rect">
+            <a:avLst/>
+          </a:prstGeom>
+        </p:spPr>
+      </p:pic>
+      <p:sp>
+        <p:nvSpPr>
+          <p:cNvPr id="10" name="Text 6"/>
+          <p:cNvSpPr txBox="1"/>
+          <p:nvPr/>
+        </p:nvSpPr>
+        <p:spPr>
+          <a:xfrm>
+            <a:off x="5166360" y="5166360"/>
+            <a:ext cx="1874520" cy="274320"/>
+          </a:xfrm>
+          <a:prstGeom prst="rect">
+            <a:avLst/>
+          </a:prstGeom>
+          <a:noFill/>
+          <a:ln/>
+        </p:spPr>
+        <p:txBody>
+          <a:bodyPr wrap="square" lIns="0" tIns="0" rIns="0" bIns="0" rtlCol="0" anchor="ctr"/>
+          <a:lstStyle/>
+          <a:p>
+            <a:pPr algn="ctr" indent="0" marL="0">
+              <a:buNone/>
+            </a:pPr>
+            <a:r>
+              <a:rPr lang="en-US" sz="1100" b="1" dirty="0">
+                <a:solidFill>
+                  <a:srgbClr val="22A07F"/>
+                </a:solidFill>
+                <a:latin typeface="Calibri" pitchFamily="34" charset="0"/>
+                <a:ea typeface="Calibri" pitchFamily="34" charset="-122"/>
+                <a:cs typeface="Calibri" pitchFamily="34" charset="-120"/>
+              </a:rPr>
+              <a:t>Connect on LinkedIn</a:t>
+            </a:r>
+            <a:endParaRPr lang="en-US" sz="1100" dirty="0"/>
+          </a:p>
+        </p:txBody>
+      </p:sp>
+      <p:sp>
+        <p:nvSpPr>
+          <p:cNvPr id="11" name="Text 7"/>
+          <p:cNvSpPr txBox="1"/>
+          <p:nvPr/>
+        </p:nvSpPr>
+        <p:spPr>
+          <a:xfrm>
+            <a:off x="5166360" y="5440680"/>
+            <a:ext cx="1874520" cy="274320"/>
+          </a:xfrm>
+          <a:prstGeom prst="rect">
+            <a:avLst/>
+          </a:prstGeom>
+          <a:noFill/>
+          <a:ln/>
+        </p:spPr>
+        <p:txBody>
+          <a:bodyPr wrap="square" lIns="0" tIns="0" rIns="0" bIns="0" rtlCol="0" anchor="ctr"/>
+          <a:lstStyle/>
+          <a:p>
+            <a:pPr algn="ctr" indent="0" marL="0">
+              <a:buNone/>
+            </a:pPr>
+            <a:r>
+              <a:rPr lang="en-US" sz="950" dirty="0">
+                <a:solidFill>
+                  <a:srgbClr val="7E948F"/>
+                </a:solidFill>
+                <a:latin typeface="Calibri" pitchFamily="34" charset="0"/>
+                <a:ea typeface="Calibri" pitchFamily="34" charset="-122"/>
+                <a:cs typeface="Calibri" pitchFamily="34" charset="-120"/>
+              </a:rPr>
+              <a:t>Scan to connect with Long Do</a:t>
+            </a:r>
+            <a:endParaRPr lang="en-US" sz="950" dirty="0"/>
+          </a:p>
+        </p:txBody>
+      </p:sp>
+      <p:sp>
+        <p:nvSpPr>
+          <p:cNvPr id="12" name="Shape 8"/>
           <p:cNvSpPr/>
           <p:nvPr/>
         </p:nvSpPr>
@@ -4043,14 +4145,14 @@
       </p:sp>
       <p:pic>
         <p:nvPicPr>
-          <p:cNvPr id="10" name="Image 1" descr="preencoded.png">    </p:cNvPr>
+          <p:cNvPr id="13" name="Image 2" descr="preencoded.png">    </p:cNvPr>
           <p:cNvPicPr>
             <a:picLocks noChangeAspect="1"/>
           </p:cNvPicPr>
           <p:nvPr/>
         </p:nvPicPr>
         <p:blipFill>
-          <a:blip r:embed="rId2"/>
+          <a:blip r:embed="rId3"/>
           <a:stretch>
             <a:fillRect/>
           </a:stretch>
@@ -4067,7 +4169,7 @@
       </p:pic>
       <p:sp>
         <p:nvSpPr>
-          <p:cNvPr id="11" name="Text 7"/>
+          <p:cNvPr id="14" name="Text 9"/>
           <p:cNvSpPr txBox="1"/>
           <p:nvPr/>
         </p:nvSpPr>
@@ -4106,7 +4208,7 @@
       </p:sp>
       <p:sp>
         <p:nvSpPr>
-          <p:cNvPr id="12" name="Text 8"/>
+          <p:cNvPr id="15" name="Text 10"/>
           <p:cNvSpPr txBox="1"/>
           <p:nvPr/>
         </p:nvSpPr>
@@ -4145,7 +4247,7 @@
       </p:sp>
       <p:sp>
         <p:nvSpPr>
-          <p:cNvPr id="13" name="Text 9"/>
+          <p:cNvPr id="16" name="Text 11"/>
           <p:cNvSpPr txBox="1"/>
           <p:nvPr/>
         </p:nvSpPr>
@@ -4243,7 +4345,7 @@
                 <a:latin typeface="Calibri" pitchFamily="34" charset="0"/>
                 <a:ea typeface="Calibri" pitchFamily="34" charset="-122"/>
                 <a:cs typeface="Calibri" pitchFamily="34" charset="-120"/>
-                <a:hlinkClick r:id="rId3" invalidUrl="" action="" tgtFrame="" tooltip="Long Do on LinkedIn" history="1" highlightClick="0" endSnd="0">
+                <a:hlinkClick r:id="rId4" invalidUrl="" action="" tgtFrame="" tooltip="Long Do on LinkedIn" history="1" highlightClick="0" endSnd="0">
                   <a:extLst>
                     <a:ext uri="{A12FA001-AC4F-418D-AE19-62706E023703}">
                       <ahyp:hlinkClr xmlns:ahyp="http://schemas.microsoft.com/office/drawing/2018/hyperlinkcolor" val="tx"/>
@@ -4259,7 +4361,7 @@
       </p:sp>
       <p:sp>
         <p:nvSpPr>
-          <p:cNvPr id="14" name="Text 10"/>
+          <p:cNvPr id="17" name="Text 12"/>
           <p:cNvSpPr txBox="1"/>
           <p:nvPr/>
         </p:nvSpPr>
